--- a/Introduccion a la Ingenieria/Clases/Clase 7 - Ciclo de vida de los proyectos de ingenieria/Presentacion.pptx
+++ b/Introduccion a la Ingenieria/Clases/Clase 7 - Ciclo de vida de los proyectos de ingenieria/Presentacion.pptx
@@ -5878,7 +5878,7 @@
               </a:spcAft>
             </a:pPr>
             <a:r>
-              <a:rPr sz="1600" b="0" i="0">
+              <a:rPr sz="2000" b="0" i="0">
                 <a:solidFill>
                   <a:srgbClr val="333333"/>
                 </a:solidFill>
@@ -5887,7 +5887,7 @@
               <a:t>–   </a:t>
             </a:r>
             <a:r>
-              <a:rPr sz="1600" b="1" i="0">
+              <a:rPr sz="2000" b="1" i="0">
                 <a:solidFill>
                   <a:srgbClr val="333333"/>
                 </a:solidFill>
@@ -5896,7 +5896,7 @@
               <a:t>Trabajo dirigido:</a:t>
             </a:r>
             <a:r>
-              <a:rPr sz="1600" b="0" i="0">
+              <a:rPr sz="2000" b="0" i="0">
                 <a:solidFill>
                   <a:srgbClr val="333333"/>
                 </a:solidFill>
@@ -5905,7 +5905,7 @@
               <a:t> Estudio de fases del ciclo de vida — leer el material de las seis fases y traer </a:t>
             </a:r>
             <a:r>
-              <a:rPr sz="1600" b="1" i="0">
+              <a:rPr sz="2000" b="1" i="0">
                 <a:solidFill>
                   <a:srgbClr val="333333"/>
                 </a:solidFill>
@@ -5914,7 +5914,7 @@
               <a:t>un ejemplo propio</a:t>
             </a:r>
             <a:r>
-              <a:rPr sz="1600" b="0" i="0">
+              <a:rPr sz="2000" b="0" i="0">
                 <a:solidFill>
                   <a:srgbClr val="333333"/>
                 </a:solidFill>
@@ -5930,7 +5930,7 @@
               </a:spcAft>
             </a:pPr>
             <a:r>
-              <a:rPr sz="1600" b="0" i="0">
+              <a:rPr sz="2000" b="0" i="0">
                 <a:solidFill>
                   <a:srgbClr val="333333"/>
                 </a:solidFill>
@@ -5939,7 +5939,7 @@
               <a:t>–   </a:t>
             </a:r>
             <a:r>
-              <a:rPr sz="1600" b="1" i="0">
+              <a:rPr sz="2000" b="1" i="0">
                 <a:solidFill>
                   <a:srgbClr val="333333"/>
                 </a:solidFill>
@@ -5948,7 +5948,7 @@
               <a:t>Trabajo independiente:</a:t>
             </a:r>
             <a:r>
-              <a:rPr sz="1600" b="0" i="0">
+              <a:rPr sz="2000" b="0" i="0">
                 <a:solidFill>
                   <a:srgbClr val="333333"/>
                 </a:solidFill>
@@ -5957,7 +5957,7 @@
               <a:t> Infografía explicativa del ciclo de vida </a:t>
             </a:r>
             <a:r>
-              <a:rPr sz="1600" b="1" i="0">
+              <a:rPr sz="2000" b="1" i="0">
                 <a:solidFill>
                   <a:srgbClr val="333333"/>
                 </a:solidFill>
@@ -5966,7 +5966,7 @@
               <a:t>de su propio proyecto</a:t>
             </a:r>
             <a:r>
-              <a:rPr sz="1600" b="0" i="0">
+              <a:rPr sz="2000" b="0" i="0">
                 <a:solidFill>
                   <a:srgbClr val="333333"/>
                 </a:solidFill>
@@ -5982,7 +5982,7 @@
               </a:spcAft>
             </a:pPr>
             <a:r>
-              <a:rPr sz="1600" b="0" i="0">
+              <a:rPr sz="2000" b="0" i="0">
                 <a:solidFill>
                   <a:srgbClr val="333333"/>
                 </a:solidFill>
@@ -5991,7 +5991,7 @@
               <a:t>–   </a:t>
             </a:r>
             <a:r>
-              <a:rPr sz="1600" b="1" i="0">
+              <a:rPr sz="2000" b="1" i="0">
                 <a:solidFill>
                   <a:srgbClr val="333333"/>
                 </a:solidFill>
@@ -6000,7 +6000,7 @@
               <a:t>Sesión 8 · Taller de aplicación del ciclo de vida</a:t>
             </a:r>
             <a:r>
-              <a:rPr sz="1600" b="0" i="0">
+              <a:rPr sz="2000" b="0" i="0">
                 <a:solidFill>
                   <a:srgbClr val="333333"/>
                 </a:solidFill>
@@ -6016,7 +6016,7 @@
               </a:spcAft>
             </a:pPr>
             <a:r>
-              <a:rPr sz="1600" b="0" i="0">
+              <a:rPr sz="2000" b="0" i="0">
                 <a:solidFill>
                   <a:srgbClr val="333333"/>
                 </a:solidFill>
@@ -6025,7 +6025,7 @@
               <a:t>–   </a:t>
             </a:r>
             <a:r>
-              <a:rPr sz="1600" b="1" i="0">
+              <a:rPr sz="2000" b="1" i="0">
                 <a:solidFill>
                   <a:srgbClr val="333333"/>
                 </a:solidFill>
@@ -6034,7 +6034,7 @@
               <a:t>Aviso:</a:t>
             </a:r>
             <a:r>
-              <a:rPr sz="1600" b="0" i="0">
+              <a:rPr sz="2000" b="0" i="0">
                 <a:solidFill>
                   <a:srgbClr val="333333"/>
                 </a:solidFill>
@@ -6043,7 +6043,7 @@
               <a:t> Traigan la tabla de requisitos con los criterios de aceptación </a:t>
             </a:r>
             <a:r>
-              <a:rPr sz="1600" b="1" i="0">
+              <a:rPr sz="2000" b="1" i="0">
                 <a:solidFill>
                   <a:srgbClr val="333333"/>
                 </a:solidFill>
@@ -6052,7 +6052,7 @@
               <a:t>confirmados con la persona que vive el problema</a:t>
             </a:r>
             <a:r>
-              <a:rPr sz="1600" b="0" i="0">
+              <a:rPr sz="2000" b="0" i="0">
                 <a:solidFill>
                   <a:srgbClr val="333333"/>
                 </a:solidFill>
@@ -6068,7 +6068,7 @@
               </a:spcAft>
             </a:pPr>
             <a:r>
-              <a:rPr sz="1600" b="0" i="0">
+              <a:rPr sz="2000" b="0" i="0">
                 <a:solidFill>
                   <a:srgbClr val="333333"/>
                 </a:solidFill>
@@ -6077,7 +6077,7 @@
               <a:t>–   </a:t>
             </a:r>
             <a:r>
-              <a:rPr sz="1600" b="1" i="0">
+              <a:rPr sz="2000" b="1" i="0">
                 <a:solidFill>
                   <a:srgbClr val="333333"/>
                 </a:solidFill>
@@ -6086,7 +6086,7 @@
               <a:t>Antes de salir:</a:t>
             </a:r>
             <a:r>
-              <a:rPr sz="1600" b="0" i="0">
+              <a:rPr sz="2000" b="0" i="0">
                 <a:solidFill>
                   <a:srgbClr val="333333"/>
                 </a:solidFill>
@@ -6660,7 +6660,7 @@
         <p:spPr>
           <a:xfrm>
             <a:off x="502920" y="2798064"/>
-            <a:ext cx="2164019" cy="2560320"/>
+            <a:ext cx="2164019" cy="3099816"/>
           </a:xfrm>
           <a:prstGeom prst="rect">
             <a:avLst/>
@@ -6775,7 +6775,7 @@
         <p:spPr>
           <a:xfrm>
             <a:off x="2758379" y="2798064"/>
-            <a:ext cx="2164019" cy="2560320"/>
+            <a:ext cx="2164019" cy="3099816"/>
           </a:xfrm>
           <a:prstGeom prst="rect">
             <a:avLst/>
@@ -6890,7 +6890,7 @@
         <p:spPr>
           <a:xfrm>
             <a:off x="5013838" y="2798064"/>
-            <a:ext cx="2164019" cy="2560320"/>
+            <a:ext cx="2164019" cy="3099816"/>
           </a:xfrm>
           <a:prstGeom prst="rect">
             <a:avLst/>
@@ -7005,7 +7005,7 @@
         <p:spPr>
           <a:xfrm>
             <a:off x="7269297" y="2798064"/>
-            <a:ext cx="2164019" cy="2560320"/>
+            <a:ext cx="2164019" cy="3099816"/>
           </a:xfrm>
           <a:prstGeom prst="rect">
             <a:avLst/>
@@ -7120,7 +7120,7 @@
         <p:spPr>
           <a:xfrm>
             <a:off x="9524756" y="2798064"/>
-            <a:ext cx="2164019" cy="2560320"/>
+            <a:ext cx="2164019" cy="3099816"/>
           </a:xfrm>
           <a:prstGeom prst="rect">
             <a:avLst/>
@@ -7154,8 +7154,8 @@
         </p:nvSpPr>
         <p:spPr>
           <a:xfrm>
-            <a:off x="457200" y="5943600"/>
-            <a:ext cx="11277295" cy="365760"/>
+            <a:off x="457200" y="5806440"/>
+            <a:ext cx="11277295" cy="640080"/>
           </a:xfrm>
           <a:prstGeom prst="rect">
             <a:avLst/>
@@ -7408,7 +7408,7 @@
               </a:spcAft>
             </a:pPr>
             <a:r>
-              <a:rPr sz="1600" b="0" i="0">
+              <a:rPr sz="2000" b="0" i="0">
                 <a:solidFill>
                   <a:srgbClr val="333333"/>
                 </a:solidFill>
@@ -7417,7 +7417,7 @@
               <a:t>–   Nombrar las </a:t>
             </a:r>
             <a:r>
-              <a:rPr sz="1600" b="1" i="0">
+              <a:rPr sz="2000" b="1" i="0">
                 <a:solidFill>
                   <a:srgbClr val="333333"/>
                 </a:solidFill>
@@ -7426,7 +7426,7 @@
               <a:t>fases del ciclo de vida</a:t>
             </a:r>
             <a:r>
-              <a:rPr sz="1600" b="0" i="0">
+              <a:rPr sz="2000" b="0" i="0">
                 <a:solidFill>
                   <a:srgbClr val="333333"/>
                 </a:solidFill>
@@ -7442,7 +7442,7 @@
               </a:spcAft>
             </a:pPr>
             <a:r>
-              <a:rPr sz="1600" b="0" i="0">
+              <a:rPr sz="2000" b="0" i="0">
                 <a:solidFill>
                   <a:srgbClr val="333333"/>
                 </a:solidFill>
@@ -7451,7 +7451,7 @@
               <a:t>–   Explicar por qué </a:t>
             </a:r>
             <a:r>
-              <a:rPr sz="1600" b="1" i="0">
+              <a:rPr sz="2000" b="1" i="0">
                 <a:solidFill>
                   <a:srgbClr val="333333"/>
                 </a:solidFill>
@@ -7460,7 +7460,7 @@
               <a:t>el costo de corregir un error crece</a:t>
             </a:r>
             <a:r>
-              <a:rPr sz="1600" b="0" i="0">
+              <a:rPr sz="2000" b="0" i="0">
                 <a:solidFill>
                   <a:srgbClr val="333333"/>
                 </a:solidFill>
@@ -7476,7 +7476,7 @@
               </a:spcAft>
             </a:pPr>
             <a:r>
-              <a:rPr sz="1600" b="0" i="0">
+              <a:rPr sz="2000" b="0" i="0">
                 <a:solidFill>
                   <a:srgbClr val="333333"/>
                 </a:solidFill>
@@ -7485,7 +7485,7 @@
               <a:t>–   Distinguir un </a:t>
             </a:r>
             <a:r>
-              <a:rPr sz="1600" b="1" i="0">
+              <a:rPr sz="2000" b="1" i="0">
                 <a:solidFill>
                   <a:srgbClr val="333333"/>
                 </a:solidFill>
@@ -7494,7 +7494,7 @@
               <a:t>requisito funcional</a:t>
             </a:r>
             <a:r>
-              <a:rPr sz="1600" b="0" i="0">
+              <a:rPr sz="2000" b="0" i="0">
                 <a:solidFill>
                   <a:srgbClr val="333333"/>
                 </a:solidFill>
@@ -7503,7 +7503,7 @@
               <a:t> de uno </a:t>
             </a:r>
             <a:r>
-              <a:rPr sz="1600" b="1" i="0">
+              <a:rPr sz="2000" b="1" i="0">
                 <a:solidFill>
                   <a:srgbClr val="333333"/>
                 </a:solidFill>
@@ -7512,7 +7512,7 @@
               <a:t>no funcional</a:t>
             </a:r>
             <a:r>
-              <a:rPr sz="1600" b="0" i="0">
+              <a:rPr sz="2000" b="0" i="0">
                 <a:solidFill>
                   <a:srgbClr val="333333"/>
                 </a:solidFill>
@@ -7528,7 +7528,7 @@
               </a:spcAft>
             </a:pPr>
             <a:r>
-              <a:rPr sz="1600" b="0" i="0">
+              <a:rPr sz="2000" b="0" i="0">
                 <a:solidFill>
                   <a:srgbClr val="333333"/>
                 </a:solidFill>
@@ -7537,7 +7537,7 @@
               <a:t>–   Ubicar el proyecto del equipo en una fase y decir </a:t>
             </a:r>
             <a:r>
-              <a:rPr sz="1600" b="1" i="0">
+              <a:rPr sz="2000" b="1" i="0">
                 <a:solidFill>
                   <a:srgbClr val="333333"/>
                 </a:solidFill>
@@ -7546,7 +7546,7 @@
               <a:t>qué falta para cerrarla</a:t>
             </a:r>
             <a:r>
-              <a:rPr sz="1600" b="0" i="0">
+              <a:rPr sz="2000" b="0" i="0">
                 <a:solidFill>
                   <a:srgbClr val="333333"/>
                 </a:solidFill>
@@ -10205,7 +10205,7 @@
               </a:spcAft>
             </a:pPr>
             <a:r>
-              <a:rPr sz="1300" b="0" i="0">
+              <a:rPr sz="1500" b="0" i="0">
                 <a:solidFill>
                   <a:srgbClr val="333333"/>
                 </a:solidFill>
@@ -10221,7 +10221,7 @@
               </a:spcAft>
             </a:pPr>
             <a:r>
-              <a:rPr sz="1300" b="0" i="0">
+              <a:rPr sz="1500" b="0" i="0">
                 <a:solidFill>
                   <a:srgbClr val="333333"/>
                 </a:solidFill>
@@ -10230,7 +10230,7 @@
               <a:t>–   El usuario ve el resultado </a:t>
             </a:r>
             <a:r>
-              <a:rPr sz="1300" b="1" i="0">
+              <a:rPr sz="1500" b="1" i="0">
                 <a:solidFill>
                   <a:srgbClr val="333333"/>
                 </a:solidFill>
@@ -10239,7 +10239,7 @@
               <a:t>al final</a:t>
             </a:r>
             <a:r>
-              <a:rPr sz="1300" b="0" i="0">
+              <a:rPr sz="1500" b="0" i="0">
                 <a:solidFill>
                   <a:srgbClr val="333333"/>
                 </a:solidFill>
@@ -10255,7 +10255,7 @@
               </a:spcAft>
             </a:pPr>
             <a:r>
-              <a:rPr sz="1300" b="0" i="0">
+              <a:rPr sz="1500" b="0" i="0">
                 <a:solidFill>
                   <a:srgbClr val="333333"/>
                 </a:solidFill>
@@ -10271,7 +10271,7 @@
               </a:spcAft>
             </a:pPr>
             <a:r>
-              <a:rPr sz="1300" b="0" i="0">
+              <a:rPr sz="1500" b="0" i="0">
                 <a:solidFill>
                   <a:srgbClr val="333333"/>
                 </a:solidFill>
@@ -10287,7 +10287,7 @@
               </a:spcAft>
             </a:pPr>
             <a:r>
-              <a:rPr sz="1300" b="0" i="0">
+              <a:rPr sz="1500" b="0" i="0">
                 <a:solidFill>
                   <a:srgbClr val="333333"/>
                 </a:solidFill>
@@ -10296,7 +10296,7 @@
               <a:t>–   </a:t>
             </a:r>
             <a:r>
-              <a:rPr sz="1300" b="1" i="0">
+              <a:rPr sz="1500" b="1" i="0">
                 <a:solidFill>
                   <a:srgbClr val="333333"/>
                 </a:solidFill>
@@ -10456,7 +10456,7 @@
               </a:spcAft>
             </a:pPr>
             <a:r>
-              <a:rPr sz="1300" b="0" i="0">
+              <a:rPr sz="1500" b="0" i="0">
                 <a:solidFill>
                   <a:srgbClr val="333333"/>
                 </a:solidFill>
@@ -10465,7 +10465,7 @@
               <a:t>–   Se recorren las fases </a:t>
             </a:r>
             <a:r>
-              <a:rPr sz="1300" b="1" i="0">
+              <a:rPr sz="1500" b="1" i="0">
                 <a:solidFill>
                   <a:srgbClr val="333333"/>
                 </a:solidFill>
@@ -10474,7 +10474,7 @@
               <a:t>varias veces</a:t>
             </a:r>
             <a:r>
-              <a:rPr sz="1300" b="0" i="0">
+              <a:rPr sz="1500" b="0" i="0">
                 <a:solidFill>
                   <a:srgbClr val="333333"/>
                 </a:solidFill>
@@ -10490,7 +10490,7 @@
               </a:spcAft>
             </a:pPr>
             <a:r>
-              <a:rPr sz="1300" b="0" i="0">
+              <a:rPr sz="1500" b="0" i="0">
                 <a:solidFill>
                   <a:srgbClr val="333333"/>
                 </a:solidFill>
@@ -10499,7 +10499,7 @@
               <a:t>–   El usuario ve algo </a:t>
             </a:r>
             <a:r>
-              <a:rPr sz="1300" b="1" i="0">
+              <a:rPr sz="1500" b="1" i="0">
                 <a:solidFill>
                   <a:srgbClr val="333333"/>
                 </a:solidFill>
@@ -10508,7 +10508,7 @@
               <a:t>en cada vuelta</a:t>
             </a:r>
             <a:r>
-              <a:rPr sz="1300" b="0" i="0">
+              <a:rPr sz="1500" b="0" i="0">
                 <a:solidFill>
                   <a:srgbClr val="333333"/>
                 </a:solidFill>
@@ -10524,7 +10524,7 @@
               </a:spcAft>
             </a:pPr>
             <a:r>
-              <a:rPr sz="1300" b="0" i="0">
+              <a:rPr sz="1500" b="0" i="0">
                 <a:solidFill>
                   <a:srgbClr val="333333"/>
                 </a:solidFill>
@@ -10540,7 +10540,7 @@
               </a:spcAft>
             </a:pPr>
             <a:r>
-              <a:rPr sz="1300" b="0" i="0">
+              <a:rPr sz="1500" b="0" i="0">
                 <a:solidFill>
                   <a:srgbClr val="333333"/>
                 </a:solidFill>
@@ -10556,7 +10556,7 @@
               </a:spcAft>
             </a:pPr>
             <a:r>
-              <a:rPr sz="1300" b="0" i="0">
+              <a:rPr sz="1500" b="0" i="0">
                 <a:solidFill>
                   <a:srgbClr val="333333"/>
                 </a:solidFill>
@@ -10565,7 +10565,7 @@
               <a:t>–   Es lo que va a hacer este curso: </a:t>
             </a:r>
             <a:r>
-              <a:rPr sz="1300" b="1" i="0">
+              <a:rPr sz="1500" b="1" i="0">
                 <a:solidFill>
                   <a:srgbClr val="333333"/>
                 </a:solidFill>
@@ -10574,7 +10574,7 @@
               <a:t>una vuelta corta en las sesiones 10–11 y otra en las 12–14</a:t>
             </a:r>
             <a:r>
-              <a:rPr sz="1300" b="0" i="0">
+              <a:rPr sz="1500" b="0" i="0">
                 <a:solidFill>
                   <a:srgbClr val="333333"/>
                 </a:solidFill>

--- a/Introduccion a la Ingenieria/Clases/Clase 7 - Ciclo de vida de los proyectos de ingenieria/Presentacion.pptx
+++ b/Introduccion a la Ingenieria/Clases/Clase 7 - Ciclo de vida de los proyectos de ingenieria/Presentacion.pptx
@@ -4594,7 +4594,7 @@
                 </a:solidFill>
                 <a:latin typeface="Calibri"/>
               </a:rPr>
-              <a:t> en cada una de las sesiones 8, 9, 10, 11, 12 y 14. Y la decisión de hoy que sería carísima cambiar en la sesión 14.</a:t>
+              <a:t> en cada una de las sesiones 8, 9, 10, 11, 12 y 14. Y la decisión de hoy que sería carísima cambiar en la Clase 14.</a:t>
             </a:r>
           </a:p>
         </p:txBody>
@@ -5493,7 +5493,7 @@
                 </a:solidFill>
                 <a:latin typeface="Calibri"/>
               </a:rPr>
-              <a:t>Qué queda listo en la sesión 10 y en la 12.</a:t>
+              <a:t>Qué queda listo en la Clase 10 y en la 12.</a:t>
             </a:r>
           </a:p>
         </p:txBody>
@@ -5845,7 +5845,7 @@
                 </a:solidFill>
                 <a:latin typeface="Calibri"/>
               </a:rPr>
-              <a:t>Para la sesión 8</a:t>
+              <a:t>Para la Clase 8</a:t>
             </a:r>
           </a:p>
         </p:txBody>
@@ -5997,7 +5997,7 @@
                 </a:solidFill>
                 <a:latin typeface="Calibri"/>
               </a:rPr>
-              <a:t>Sesión 8 · Taller de aplicación del ciclo de vida</a:t>
+              <a:t>Clase 8 · Taller de aplicación del ciclo de vida</a:t>
             </a:r>
             <a:r>
               <a:rPr sz="2000" b="0" i="0">
@@ -10571,7 +10571,7 @@
                 </a:solidFill>
                 <a:latin typeface="Calibri"/>
               </a:rPr>
-              <a:t>una vuelta corta en las sesiones 10–11 y otra en las 12–14</a:t>
+              <a:t>una vuelta corta en las Clases 10-11 y otra en las 12-14</a:t>
             </a:r>
             <a:r>
               <a:rPr sz="1500" b="0" i="0">
